--- a/docs/tcc/apresentacao/Apresentacao_Banca_Psike.pptx
+++ b/docs/tcc/apresentacao/Apresentacao_Banca_Psike.pptx
@@ -5650,7 +5650,7 @@
                 </a:solidFill>
                 <a:latin typeface="Calibri"/>
               </a:rPr>
-              <a:t>–  Setor elétrico: 2.089 acidentes de origem elétrica em 2023, 781 óbitos (Abracopel, 2024); 250 mortes na rede de distribuição (Abradee, 2024).</a:t>
+              <a:t>–  Setor elétrico: 2.089 acidentes de origem elétrica em 2023, 781 óbitos (Abracopel, 2024); 250 mortes na rede de distribuição (Acidentes [...], 2024).</a:t>
             </a:r>
           </a:p>
           <a:p>
